--- a/Slide/Slide -Lõpputöö.pptx
+++ b/Slide/Slide -Lõpputöö.pptx
@@ -379,7 +379,7 @@
           <a:p>
             <a:fld id="{58268699-2479-4C0A-8A94-0691180AD901}" type="datetimeFigureOut">
               <a:rPr lang="en-US" smtClean="0"/>
-              <a:t>5/5/26</a:t>
+              <a:t>5/6/26</a:t>
             </a:fld>
             <a:endParaRPr lang="en-US"/>
           </a:p>
@@ -556,7 +556,7 @@
           <a:p>
             <a:fld id="{D945F7B4-7442-4021-9F1E-8BC3C363C892}" type="datetimeFigureOut">
               <a:rPr lang="en-US" noProof="0" smtClean="0"/>
-              <a:t>5/5/26</a:t>
+              <a:t>5/6/26</a:t>
             </a:fld>
             <a:endParaRPr lang="en-US" noProof="0"/>
           </a:p>
@@ -821,6 +821,1428 @@
     </a:lvl9pPr>
   </p:notesStyle>
 </p:notesMaster>
+</file>
+
+<file path=ppt/notesSlides/notesSlide1.xml><?xml version="1.0" encoding="utf-8"?>
+<p:notes xmlns:a="http://schemas.openxmlformats.org/drawingml/2006/main" xmlns:r="http://schemas.openxmlformats.org/officeDocument/2006/relationships" xmlns:p="http://schemas.openxmlformats.org/presentationml/2006/main">
+  <p:cSld>
+    <p:spTree>
+      <p:nvGrpSpPr>
+        <p:cNvPr id="1" name=""/>
+        <p:cNvGrpSpPr/>
+        <p:nvPr/>
+      </p:nvGrpSpPr>
+      <p:grpSpPr>
+        <a:xfrm>
+          <a:off x="0" y="0"/>
+          <a:ext cx="0" cy="0"/>
+          <a:chOff x="0" y="0"/>
+          <a:chExt cx="0" cy="0"/>
+        </a:xfrm>
+      </p:grpSpPr>
+      <p:sp>
+        <p:nvSpPr>
+          <p:cNvPr id="2" name="Slide Image Placeholder 1"/>
+          <p:cNvSpPr>
+            <a:spLocks noGrp="1" noRot="1" noChangeAspect="1"/>
+          </p:cNvSpPr>
+          <p:nvPr>
+            <p:ph type="sldImg"/>
+          </p:nvPr>
+        </p:nvSpPr>
+        <p:spPr/>
+      </p:sp>
+      <p:sp>
+        <p:nvSpPr>
+          <p:cNvPr id="3" name="Notes Placeholder 2"/>
+          <p:cNvSpPr>
+            <a:spLocks noGrp="1"/>
+          </p:cNvSpPr>
+          <p:nvPr>
+            <p:ph type="body" idx="1"/>
+          </p:nvPr>
+        </p:nvSpPr>
+        <p:spPr/>
+        <p:txBody>
+          <a:bodyPr/>
+          <a:lstStyle/>
+          <a:p>
+            <a:r>
+              <a:rPr lang="en-EE" sz="1800" kern="100" dirty="0">
+                <a:solidFill>
+                  <a:srgbClr val="000000"/>
+                </a:solidFill>
+                <a:effectLst/>
+                <a:latin typeface="Aptos" panose="020B0004020202020204" pitchFamily="34" charset="0"/>
+                <a:ea typeface="Times New Roman" panose="02020603050405020304" pitchFamily="18" charset="0"/>
+                <a:cs typeface="Times New Roman" panose="02020603050405020304" pitchFamily="18" charset="0"/>
+              </a:rPr>
+              <a:t>Esineja märkus:</a:t>
+            </a:r>
+            <a:endParaRPr lang="en-EE" sz="1800" kern="100" dirty="0">
+              <a:solidFill>
+                <a:srgbClr val="000000"/>
+              </a:solidFill>
+              <a:effectLst/>
+              <a:latin typeface="Aptos" panose="020B0004020202020204" pitchFamily="34" charset="0"/>
+              <a:ea typeface="Aptos" panose="020B0004020202020204" pitchFamily="34" charset="0"/>
+              <a:cs typeface="Times New Roman" panose="02020603050405020304" pitchFamily="18" charset="0"/>
+            </a:endParaRPr>
+          </a:p>
+          <a:p>
+            <a:r>
+              <a:rPr lang="en-EE" sz="1800" kern="100" dirty="0">
+                <a:solidFill>
+                  <a:srgbClr val="000000"/>
+                </a:solidFill>
+                <a:effectLst/>
+                <a:latin typeface="Aptos" panose="020B0004020202020204" pitchFamily="34" charset="0"/>
+                <a:ea typeface="Times New Roman" panose="02020603050405020304" pitchFamily="18" charset="0"/>
+                <a:cs typeface="Times New Roman" panose="02020603050405020304" pitchFamily="18" charset="0"/>
+              </a:rPr>
+              <a:t>Tervitan hindamiskomisjoni ja tutvustan oma lõputöö projekti, mille eesmärk oli luua chatbot, mis automatiseerib korduvatele küsimustele vastamise ja teavituste edastamise.</a:t>
+            </a:r>
+            <a:endParaRPr lang="en-EE" sz="1800" kern="100" dirty="0">
+              <a:solidFill>
+                <a:srgbClr val="000000"/>
+              </a:solidFill>
+              <a:effectLst/>
+              <a:latin typeface="Aptos" panose="020B0004020202020204" pitchFamily="34" charset="0"/>
+              <a:ea typeface="Aptos" panose="020B0004020202020204" pitchFamily="34" charset="0"/>
+              <a:cs typeface="Times New Roman" panose="02020603050405020304" pitchFamily="18" charset="0"/>
+            </a:endParaRPr>
+          </a:p>
+          <a:p>
+            <a:endParaRPr lang="en-EE" dirty="0"/>
+          </a:p>
+        </p:txBody>
+      </p:sp>
+      <p:sp>
+        <p:nvSpPr>
+          <p:cNvPr id="4" name="Slide Number Placeholder 3"/>
+          <p:cNvSpPr>
+            <a:spLocks noGrp="1"/>
+          </p:cNvSpPr>
+          <p:nvPr>
+            <p:ph type="sldNum" sz="quarter" idx="5"/>
+          </p:nvPr>
+        </p:nvSpPr>
+        <p:spPr/>
+        <p:txBody>
+          <a:bodyPr/>
+          <a:lstStyle/>
+          <a:p>
+            <a:fld id="{DECDE012-9E2E-4477-8B5C-4E7D4E9BCBA6}" type="slidenum">
+              <a:rPr lang="en-US" noProof="0" smtClean="0"/>
+              <a:t>1</a:t>
+            </a:fld>
+            <a:endParaRPr lang="en-US" noProof="0"/>
+          </a:p>
+        </p:txBody>
+      </p:sp>
+    </p:spTree>
+    <p:extLst>
+      <p:ext uri="{BB962C8B-B14F-4D97-AF65-F5344CB8AC3E}">
+        <p14:creationId xmlns:p14="http://schemas.microsoft.com/office/powerpoint/2010/main" val="3601645829"/>
+      </p:ext>
+    </p:extLst>
+  </p:cSld>
+  <p:clrMapOvr>
+    <a:masterClrMapping/>
+  </p:clrMapOvr>
+</p:notes>
+</file>
+
+<file path=ppt/notesSlides/notesSlide10.xml><?xml version="1.0" encoding="utf-8"?>
+<p:notes xmlns:a="http://schemas.openxmlformats.org/drawingml/2006/main" xmlns:r="http://schemas.openxmlformats.org/officeDocument/2006/relationships" xmlns:p="http://schemas.openxmlformats.org/presentationml/2006/main">
+  <p:cSld>
+    <p:spTree>
+      <p:nvGrpSpPr>
+        <p:cNvPr id="1" name=""/>
+        <p:cNvGrpSpPr/>
+        <p:nvPr/>
+      </p:nvGrpSpPr>
+      <p:grpSpPr>
+        <a:xfrm>
+          <a:off x="0" y="0"/>
+          <a:ext cx="0" cy="0"/>
+          <a:chOff x="0" y="0"/>
+          <a:chExt cx="0" cy="0"/>
+        </a:xfrm>
+      </p:grpSpPr>
+      <p:sp>
+        <p:nvSpPr>
+          <p:cNvPr id="2" name="Slide Image Placeholder 1"/>
+          <p:cNvSpPr>
+            <a:spLocks noGrp="1" noRot="1" noChangeAspect="1"/>
+          </p:cNvSpPr>
+          <p:nvPr>
+            <p:ph type="sldImg"/>
+          </p:nvPr>
+        </p:nvSpPr>
+        <p:spPr/>
+      </p:sp>
+      <p:sp>
+        <p:nvSpPr>
+          <p:cNvPr id="3" name="Notes Placeholder 2"/>
+          <p:cNvSpPr>
+            <a:spLocks noGrp="1"/>
+          </p:cNvSpPr>
+          <p:nvPr>
+            <p:ph type="body" idx="1"/>
+          </p:nvPr>
+        </p:nvSpPr>
+        <p:spPr/>
+        <p:txBody>
+          <a:bodyPr/>
+          <a:lstStyle/>
+          <a:p>
+            <a:r>
+              <a:rPr lang="en-EE" sz="1800" kern="100" dirty="0">
+                <a:solidFill>
+                  <a:srgbClr val="000000"/>
+                </a:solidFill>
+                <a:effectLst/>
+                <a:latin typeface="Aptos" panose="020B0004020202020204" pitchFamily="34" charset="0"/>
+                <a:ea typeface="Times New Roman" panose="02020603050405020304" pitchFamily="18" charset="0"/>
+                <a:cs typeface="Times New Roman" panose="02020603050405020304" pitchFamily="18" charset="0"/>
+              </a:rPr>
+              <a:t>Esineja märkus:</a:t>
+            </a:r>
+            <a:endParaRPr lang="en-EE" sz="1800" kern="100" dirty="0">
+              <a:solidFill>
+                <a:srgbClr val="000000"/>
+              </a:solidFill>
+              <a:effectLst/>
+              <a:latin typeface="Aptos" panose="020B0004020202020204" pitchFamily="34" charset="0"/>
+              <a:ea typeface="Aptos" panose="020B0004020202020204" pitchFamily="34" charset="0"/>
+              <a:cs typeface="Times New Roman" panose="02020603050405020304" pitchFamily="18" charset="0"/>
+            </a:endParaRPr>
+          </a:p>
+          <a:p>
+            <a:r>
+              <a:rPr lang="en-EE" sz="1800" kern="100" dirty="0">
+                <a:solidFill>
+                  <a:srgbClr val="000000"/>
+                </a:solidFill>
+                <a:effectLst/>
+                <a:latin typeface="Aptos" panose="020B0004020202020204" pitchFamily="34" charset="0"/>
+                <a:ea typeface="Times New Roman" panose="02020603050405020304" pitchFamily="18" charset="0"/>
+                <a:cs typeface="Times New Roman" panose="02020603050405020304" pitchFamily="18" charset="0"/>
+              </a:rPr>
+              <a:t>Rõhutan, et projekt on jätkusuutlik ja arendatav.</a:t>
+            </a:r>
+            <a:endParaRPr lang="en-EE" sz="1800" kern="100" dirty="0">
+              <a:solidFill>
+                <a:srgbClr val="000000"/>
+              </a:solidFill>
+              <a:effectLst/>
+              <a:latin typeface="Aptos" panose="020B0004020202020204" pitchFamily="34" charset="0"/>
+              <a:ea typeface="Aptos" panose="020B0004020202020204" pitchFamily="34" charset="0"/>
+              <a:cs typeface="Times New Roman" panose="02020603050405020304" pitchFamily="18" charset="0"/>
+            </a:endParaRPr>
+          </a:p>
+          <a:p>
+            <a:endParaRPr lang="en-EE" dirty="0"/>
+          </a:p>
+        </p:txBody>
+      </p:sp>
+      <p:sp>
+        <p:nvSpPr>
+          <p:cNvPr id="4" name="Slide Number Placeholder 3"/>
+          <p:cNvSpPr>
+            <a:spLocks noGrp="1"/>
+          </p:cNvSpPr>
+          <p:nvPr>
+            <p:ph type="sldNum" sz="quarter" idx="5"/>
+          </p:nvPr>
+        </p:nvSpPr>
+        <p:spPr/>
+        <p:txBody>
+          <a:bodyPr/>
+          <a:lstStyle/>
+          <a:p>
+            <a:fld id="{DECDE012-9E2E-4477-8B5C-4E7D4E9BCBA6}" type="slidenum">
+              <a:rPr lang="en-US" noProof="0" smtClean="0"/>
+              <a:t>10</a:t>
+            </a:fld>
+            <a:endParaRPr lang="en-US" noProof="0"/>
+          </a:p>
+        </p:txBody>
+      </p:sp>
+    </p:spTree>
+    <p:extLst>
+      <p:ext uri="{BB962C8B-B14F-4D97-AF65-F5344CB8AC3E}">
+        <p14:creationId xmlns:p14="http://schemas.microsoft.com/office/powerpoint/2010/main" val="1342667443"/>
+      </p:ext>
+    </p:extLst>
+  </p:cSld>
+  <p:clrMapOvr>
+    <a:masterClrMapping/>
+  </p:clrMapOvr>
+</p:notes>
+</file>
+
+<file path=ppt/notesSlides/notesSlide11.xml><?xml version="1.0" encoding="utf-8"?>
+<p:notes xmlns:a="http://schemas.openxmlformats.org/drawingml/2006/main" xmlns:r="http://schemas.openxmlformats.org/officeDocument/2006/relationships" xmlns:p="http://schemas.openxmlformats.org/presentationml/2006/main">
+  <p:cSld>
+    <p:spTree>
+      <p:nvGrpSpPr>
+        <p:cNvPr id="1" name=""/>
+        <p:cNvGrpSpPr/>
+        <p:nvPr/>
+      </p:nvGrpSpPr>
+      <p:grpSpPr>
+        <a:xfrm>
+          <a:off x="0" y="0"/>
+          <a:ext cx="0" cy="0"/>
+          <a:chOff x="0" y="0"/>
+          <a:chExt cx="0" cy="0"/>
+        </a:xfrm>
+      </p:grpSpPr>
+      <p:sp>
+        <p:nvSpPr>
+          <p:cNvPr id="2" name="Slide Image Placeholder 1"/>
+          <p:cNvSpPr>
+            <a:spLocks noGrp="1" noRot="1" noChangeAspect="1"/>
+          </p:cNvSpPr>
+          <p:nvPr>
+            <p:ph type="sldImg"/>
+          </p:nvPr>
+        </p:nvSpPr>
+        <p:spPr/>
+      </p:sp>
+      <p:sp>
+        <p:nvSpPr>
+          <p:cNvPr id="3" name="Notes Placeholder 2"/>
+          <p:cNvSpPr>
+            <a:spLocks noGrp="1"/>
+          </p:cNvSpPr>
+          <p:nvPr>
+            <p:ph type="body" idx="1"/>
+          </p:nvPr>
+        </p:nvSpPr>
+        <p:spPr/>
+        <p:txBody>
+          <a:bodyPr/>
+          <a:lstStyle/>
+          <a:p>
+            <a:r>
+              <a:rPr lang="en-EE" sz="1800" kern="100" dirty="0">
+                <a:solidFill>
+                  <a:srgbClr val="000000"/>
+                </a:solidFill>
+                <a:effectLst/>
+                <a:latin typeface="Aptos" panose="020B0004020202020204" pitchFamily="34" charset="0"/>
+                <a:ea typeface="Times New Roman" panose="02020603050405020304" pitchFamily="18" charset="0"/>
+                <a:cs typeface="Times New Roman" panose="02020603050405020304" pitchFamily="18" charset="0"/>
+              </a:rPr>
+              <a:t>Esineja märkus:</a:t>
+            </a:r>
+            <a:endParaRPr lang="en-EE" sz="1800" kern="100" dirty="0">
+              <a:solidFill>
+                <a:srgbClr val="000000"/>
+              </a:solidFill>
+              <a:effectLst/>
+              <a:latin typeface="Aptos" panose="020B0004020202020204" pitchFamily="34" charset="0"/>
+              <a:ea typeface="Aptos" panose="020B0004020202020204" pitchFamily="34" charset="0"/>
+              <a:cs typeface="Times New Roman" panose="02020603050405020304" pitchFamily="18" charset="0"/>
+            </a:endParaRPr>
+          </a:p>
+          <a:p>
+            <a:r>
+              <a:rPr lang="en-EE" sz="1800" kern="100" dirty="0">
+                <a:solidFill>
+                  <a:srgbClr val="000000"/>
+                </a:solidFill>
+                <a:effectLst/>
+                <a:latin typeface="Aptos" panose="020B0004020202020204" pitchFamily="34" charset="0"/>
+                <a:ea typeface="Times New Roman" panose="02020603050405020304" pitchFamily="18" charset="0"/>
+                <a:cs typeface="Times New Roman" panose="02020603050405020304" pitchFamily="18" charset="0"/>
+              </a:rPr>
+              <a:t>Tänan komisjoni ja olen valmis küsimusteks.</a:t>
+            </a:r>
+            <a:endParaRPr lang="en-EE" sz="1800" kern="100" dirty="0">
+              <a:solidFill>
+                <a:srgbClr val="000000"/>
+              </a:solidFill>
+              <a:effectLst/>
+              <a:latin typeface="Aptos" panose="020B0004020202020204" pitchFamily="34" charset="0"/>
+              <a:ea typeface="Aptos" panose="020B0004020202020204" pitchFamily="34" charset="0"/>
+              <a:cs typeface="Times New Roman" panose="02020603050405020304" pitchFamily="18" charset="0"/>
+            </a:endParaRPr>
+          </a:p>
+          <a:p>
+            <a:endParaRPr lang="en-EE" dirty="0"/>
+          </a:p>
+        </p:txBody>
+      </p:sp>
+      <p:sp>
+        <p:nvSpPr>
+          <p:cNvPr id="4" name="Slide Number Placeholder 3"/>
+          <p:cNvSpPr>
+            <a:spLocks noGrp="1"/>
+          </p:cNvSpPr>
+          <p:nvPr>
+            <p:ph type="sldNum" sz="quarter" idx="5"/>
+          </p:nvPr>
+        </p:nvSpPr>
+        <p:spPr/>
+        <p:txBody>
+          <a:bodyPr/>
+          <a:lstStyle/>
+          <a:p>
+            <a:fld id="{DECDE012-9E2E-4477-8B5C-4E7D4E9BCBA6}" type="slidenum">
+              <a:rPr lang="en-US" noProof="0" smtClean="0"/>
+              <a:t>11</a:t>
+            </a:fld>
+            <a:endParaRPr lang="en-US" noProof="0"/>
+          </a:p>
+        </p:txBody>
+      </p:sp>
+    </p:spTree>
+    <p:extLst>
+      <p:ext uri="{BB962C8B-B14F-4D97-AF65-F5344CB8AC3E}">
+        <p14:creationId xmlns:p14="http://schemas.microsoft.com/office/powerpoint/2010/main" val="1694654081"/>
+      </p:ext>
+    </p:extLst>
+  </p:cSld>
+  <p:clrMapOvr>
+    <a:masterClrMapping/>
+  </p:clrMapOvr>
+</p:notes>
+</file>
+
+<file path=ppt/notesSlides/notesSlide2.xml><?xml version="1.0" encoding="utf-8"?>
+<p:notes xmlns:a="http://schemas.openxmlformats.org/drawingml/2006/main" xmlns:r="http://schemas.openxmlformats.org/officeDocument/2006/relationships" xmlns:p="http://schemas.openxmlformats.org/presentationml/2006/main">
+  <p:cSld>
+    <p:spTree>
+      <p:nvGrpSpPr>
+        <p:cNvPr id="1" name=""/>
+        <p:cNvGrpSpPr/>
+        <p:nvPr/>
+      </p:nvGrpSpPr>
+      <p:grpSpPr>
+        <a:xfrm>
+          <a:off x="0" y="0"/>
+          <a:ext cx="0" cy="0"/>
+          <a:chOff x="0" y="0"/>
+          <a:chExt cx="0" cy="0"/>
+        </a:xfrm>
+      </p:grpSpPr>
+      <p:sp>
+        <p:nvSpPr>
+          <p:cNvPr id="2" name="Slide Image Placeholder 1"/>
+          <p:cNvSpPr>
+            <a:spLocks noGrp="1" noRot="1" noChangeAspect="1"/>
+          </p:cNvSpPr>
+          <p:nvPr>
+            <p:ph type="sldImg"/>
+          </p:nvPr>
+        </p:nvSpPr>
+        <p:spPr/>
+      </p:sp>
+      <p:sp>
+        <p:nvSpPr>
+          <p:cNvPr id="3" name="Notes Placeholder 2"/>
+          <p:cNvSpPr>
+            <a:spLocks noGrp="1"/>
+          </p:cNvSpPr>
+          <p:nvPr>
+            <p:ph type="body" idx="1"/>
+          </p:nvPr>
+        </p:nvSpPr>
+        <p:spPr/>
+        <p:txBody>
+          <a:bodyPr/>
+          <a:lstStyle/>
+          <a:p>
+            <a:r>
+              <a:rPr lang="en-EE" sz="1800" kern="100" dirty="0">
+                <a:solidFill>
+                  <a:srgbClr val="000000"/>
+                </a:solidFill>
+                <a:effectLst/>
+                <a:latin typeface="Aptos" panose="020B0004020202020204" pitchFamily="34" charset="0"/>
+                <a:ea typeface="Times New Roman" panose="02020603050405020304" pitchFamily="18" charset="0"/>
+                <a:cs typeface="Times New Roman" panose="02020603050405020304" pitchFamily="18" charset="0"/>
+              </a:rPr>
+              <a:t>Esineja märkus:</a:t>
+            </a:r>
+            <a:endParaRPr lang="en-EE" sz="1800" kern="100" dirty="0">
+              <a:solidFill>
+                <a:srgbClr val="000000"/>
+              </a:solidFill>
+              <a:effectLst/>
+              <a:latin typeface="Aptos" panose="020B0004020202020204" pitchFamily="34" charset="0"/>
+              <a:ea typeface="Aptos" panose="020B0004020202020204" pitchFamily="34" charset="0"/>
+              <a:cs typeface="Times New Roman" panose="02020603050405020304" pitchFamily="18" charset="0"/>
+            </a:endParaRPr>
+          </a:p>
+          <a:p>
+            <a:r>
+              <a:rPr lang="en-EE" sz="1800" kern="100" dirty="0">
+                <a:solidFill>
+                  <a:srgbClr val="000000"/>
+                </a:solidFill>
+                <a:effectLst/>
+                <a:latin typeface="Aptos" panose="020B0004020202020204" pitchFamily="34" charset="0"/>
+                <a:ea typeface="Times New Roman" panose="02020603050405020304" pitchFamily="18" charset="0"/>
+                <a:cs typeface="Times New Roman" panose="02020603050405020304" pitchFamily="18" charset="0"/>
+              </a:rPr>
+              <a:t>Selgitan, et probleem ei ole tehniline, vaid organisatsiooniline — info on olemas, kuid mitte kiiresti leitav.</a:t>
+            </a:r>
+            <a:endParaRPr lang="en-EE" sz="1800" kern="100" dirty="0">
+              <a:solidFill>
+                <a:srgbClr val="000000"/>
+              </a:solidFill>
+              <a:effectLst/>
+              <a:latin typeface="Aptos" panose="020B0004020202020204" pitchFamily="34" charset="0"/>
+              <a:ea typeface="Aptos" panose="020B0004020202020204" pitchFamily="34" charset="0"/>
+              <a:cs typeface="Times New Roman" panose="02020603050405020304" pitchFamily="18" charset="0"/>
+            </a:endParaRPr>
+          </a:p>
+          <a:p>
+            <a:endParaRPr lang="en-EE" dirty="0"/>
+          </a:p>
+        </p:txBody>
+      </p:sp>
+      <p:sp>
+        <p:nvSpPr>
+          <p:cNvPr id="4" name="Slide Number Placeholder 3"/>
+          <p:cNvSpPr>
+            <a:spLocks noGrp="1"/>
+          </p:cNvSpPr>
+          <p:nvPr>
+            <p:ph type="sldNum" sz="quarter" idx="5"/>
+          </p:nvPr>
+        </p:nvSpPr>
+        <p:spPr/>
+        <p:txBody>
+          <a:bodyPr/>
+          <a:lstStyle/>
+          <a:p>
+            <a:fld id="{DECDE012-9E2E-4477-8B5C-4E7D4E9BCBA6}" type="slidenum">
+              <a:rPr lang="en-US" noProof="0" smtClean="0"/>
+              <a:t>2</a:t>
+            </a:fld>
+            <a:endParaRPr lang="en-US" noProof="0"/>
+          </a:p>
+        </p:txBody>
+      </p:sp>
+    </p:spTree>
+    <p:extLst>
+      <p:ext uri="{BB962C8B-B14F-4D97-AF65-F5344CB8AC3E}">
+        <p14:creationId xmlns:p14="http://schemas.microsoft.com/office/powerpoint/2010/main" val="519277514"/>
+      </p:ext>
+    </p:extLst>
+  </p:cSld>
+  <p:clrMapOvr>
+    <a:masterClrMapping/>
+  </p:clrMapOvr>
+</p:notes>
+</file>
+
+<file path=ppt/notesSlides/notesSlide3.xml><?xml version="1.0" encoding="utf-8"?>
+<p:notes xmlns:a="http://schemas.openxmlformats.org/drawingml/2006/main" xmlns:r="http://schemas.openxmlformats.org/officeDocument/2006/relationships" xmlns:p="http://schemas.openxmlformats.org/presentationml/2006/main">
+  <p:cSld>
+    <p:spTree>
+      <p:nvGrpSpPr>
+        <p:cNvPr id="1" name=""/>
+        <p:cNvGrpSpPr/>
+        <p:nvPr/>
+      </p:nvGrpSpPr>
+      <p:grpSpPr>
+        <a:xfrm>
+          <a:off x="0" y="0"/>
+          <a:ext cx="0" cy="0"/>
+          <a:chOff x="0" y="0"/>
+          <a:chExt cx="0" cy="0"/>
+        </a:xfrm>
+      </p:grpSpPr>
+      <p:sp>
+        <p:nvSpPr>
+          <p:cNvPr id="2" name="Slide Image Placeholder 1"/>
+          <p:cNvSpPr>
+            <a:spLocks noGrp="1" noRot="1" noChangeAspect="1"/>
+          </p:cNvSpPr>
+          <p:nvPr>
+            <p:ph type="sldImg"/>
+          </p:nvPr>
+        </p:nvSpPr>
+        <p:spPr/>
+      </p:sp>
+      <p:sp>
+        <p:nvSpPr>
+          <p:cNvPr id="3" name="Notes Placeholder 2"/>
+          <p:cNvSpPr>
+            <a:spLocks noGrp="1"/>
+          </p:cNvSpPr>
+          <p:nvPr>
+            <p:ph type="body" idx="1"/>
+          </p:nvPr>
+        </p:nvSpPr>
+        <p:spPr/>
+        <p:txBody>
+          <a:bodyPr/>
+          <a:lstStyle/>
+          <a:p>
+            <a:r>
+              <a:rPr lang="en-EE" sz="1800" kern="100" dirty="0">
+                <a:solidFill>
+                  <a:srgbClr val="000000"/>
+                </a:solidFill>
+                <a:effectLst/>
+                <a:latin typeface="Aptos" panose="020B0004020202020204" pitchFamily="34" charset="0"/>
+                <a:ea typeface="Times New Roman" panose="02020603050405020304" pitchFamily="18" charset="0"/>
+                <a:cs typeface="Times New Roman" panose="02020603050405020304" pitchFamily="18" charset="0"/>
+              </a:rPr>
+              <a:t>Esineja märkus:</a:t>
+            </a:r>
+            <a:endParaRPr lang="en-EE" sz="1800" kern="100" dirty="0">
+              <a:solidFill>
+                <a:srgbClr val="000000"/>
+              </a:solidFill>
+              <a:effectLst/>
+              <a:latin typeface="Aptos" panose="020B0004020202020204" pitchFamily="34" charset="0"/>
+              <a:ea typeface="Aptos" panose="020B0004020202020204" pitchFamily="34" charset="0"/>
+              <a:cs typeface="Times New Roman" panose="02020603050405020304" pitchFamily="18" charset="0"/>
+            </a:endParaRPr>
+          </a:p>
+          <a:p>
+            <a:r>
+              <a:rPr lang="en-EE" sz="1800" dirty="0">
+                <a:effectLst/>
+                <a:latin typeface="Aptos" panose="020B0004020202020204" pitchFamily="34" charset="0"/>
+                <a:ea typeface="Times New Roman" panose="02020603050405020304" pitchFamily="18" charset="0"/>
+                <a:cs typeface="Times New Roman" panose="02020603050405020304" pitchFamily="18" charset="0"/>
+              </a:rPr>
+              <a:t>Rõhutan, et eesmärk ei olnud lihtsalt bot, vaid töökindel infosüsteem</a:t>
+            </a:r>
+            <a:r>
+              <a:rPr lang="en-EE" dirty="0">
+                <a:effectLst/>
+              </a:rPr>
+              <a:t> </a:t>
+            </a:r>
+            <a:endParaRPr lang="en-EE" dirty="0"/>
+          </a:p>
+        </p:txBody>
+      </p:sp>
+      <p:sp>
+        <p:nvSpPr>
+          <p:cNvPr id="4" name="Slide Number Placeholder 3"/>
+          <p:cNvSpPr>
+            <a:spLocks noGrp="1"/>
+          </p:cNvSpPr>
+          <p:nvPr>
+            <p:ph type="sldNum" sz="quarter" idx="5"/>
+          </p:nvPr>
+        </p:nvSpPr>
+        <p:spPr/>
+        <p:txBody>
+          <a:bodyPr/>
+          <a:lstStyle/>
+          <a:p>
+            <a:fld id="{DECDE012-9E2E-4477-8B5C-4E7D4E9BCBA6}" type="slidenum">
+              <a:rPr lang="en-US" noProof="0" smtClean="0"/>
+              <a:t>3</a:t>
+            </a:fld>
+            <a:endParaRPr lang="en-US" noProof="0"/>
+          </a:p>
+        </p:txBody>
+      </p:sp>
+    </p:spTree>
+    <p:extLst>
+      <p:ext uri="{BB962C8B-B14F-4D97-AF65-F5344CB8AC3E}">
+        <p14:creationId xmlns:p14="http://schemas.microsoft.com/office/powerpoint/2010/main" val="2911412736"/>
+      </p:ext>
+    </p:extLst>
+  </p:cSld>
+  <p:clrMapOvr>
+    <a:masterClrMapping/>
+  </p:clrMapOvr>
+</p:notes>
+</file>
+
+<file path=ppt/notesSlides/notesSlide4.xml><?xml version="1.0" encoding="utf-8"?>
+<p:notes xmlns:a="http://schemas.openxmlformats.org/drawingml/2006/main" xmlns:r="http://schemas.openxmlformats.org/officeDocument/2006/relationships" xmlns:p="http://schemas.openxmlformats.org/presentationml/2006/main">
+  <p:cSld>
+    <p:spTree>
+      <p:nvGrpSpPr>
+        <p:cNvPr id="1" name=""/>
+        <p:cNvGrpSpPr/>
+        <p:nvPr/>
+      </p:nvGrpSpPr>
+      <p:grpSpPr>
+        <a:xfrm>
+          <a:off x="0" y="0"/>
+          <a:ext cx="0" cy="0"/>
+          <a:chOff x="0" y="0"/>
+          <a:chExt cx="0" cy="0"/>
+        </a:xfrm>
+      </p:grpSpPr>
+      <p:sp>
+        <p:nvSpPr>
+          <p:cNvPr id="2" name="Slide Image Placeholder 1"/>
+          <p:cNvSpPr>
+            <a:spLocks noGrp="1" noRot="1" noChangeAspect="1"/>
+          </p:cNvSpPr>
+          <p:nvPr>
+            <p:ph type="sldImg"/>
+          </p:nvPr>
+        </p:nvSpPr>
+        <p:spPr/>
+      </p:sp>
+      <p:sp>
+        <p:nvSpPr>
+          <p:cNvPr id="3" name="Notes Placeholder 2"/>
+          <p:cNvSpPr>
+            <a:spLocks noGrp="1"/>
+          </p:cNvSpPr>
+          <p:nvPr>
+            <p:ph type="body" idx="1"/>
+          </p:nvPr>
+        </p:nvSpPr>
+        <p:spPr/>
+        <p:txBody>
+          <a:bodyPr/>
+          <a:lstStyle/>
+          <a:p>
+            <a:r>
+              <a:rPr lang="en-EE" sz="1800" kern="100" dirty="0">
+                <a:solidFill>
+                  <a:srgbClr val="000000"/>
+                </a:solidFill>
+                <a:effectLst/>
+                <a:latin typeface="Aptos" panose="020B0004020202020204" pitchFamily="34" charset="0"/>
+                <a:ea typeface="Times New Roman" panose="02020603050405020304" pitchFamily="18" charset="0"/>
+                <a:cs typeface="Times New Roman" panose="02020603050405020304" pitchFamily="18" charset="0"/>
+              </a:rPr>
+              <a:t>Esineja märkus:</a:t>
+            </a:r>
+            <a:endParaRPr lang="en-EE" sz="1800" kern="100" dirty="0">
+              <a:solidFill>
+                <a:srgbClr val="000000"/>
+              </a:solidFill>
+              <a:effectLst/>
+              <a:latin typeface="Aptos" panose="020B0004020202020204" pitchFamily="34" charset="0"/>
+              <a:ea typeface="Aptos" panose="020B0004020202020204" pitchFamily="34" charset="0"/>
+              <a:cs typeface="Times New Roman" panose="02020603050405020304" pitchFamily="18" charset="0"/>
+            </a:endParaRPr>
+          </a:p>
+          <a:p>
+            <a:r>
+              <a:rPr lang="en-EE" sz="1800" kern="100" dirty="0">
+                <a:solidFill>
+                  <a:srgbClr val="000000"/>
+                </a:solidFill>
+                <a:effectLst/>
+                <a:latin typeface="Aptos" panose="020B0004020202020204" pitchFamily="34" charset="0"/>
+                <a:ea typeface="Times New Roman" panose="02020603050405020304" pitchFamily="18" charset="0"/>
+                <a:cs typeface="Times New Roman" panose="02020603050405020304" pitchFamily="18" charset="0"/>
+              </a:rPr>
+              <a:t>Selgitan, miks valisin modulaarse arhitektuuri — lihtne hooldada ja laiendada.</a:t>
+            </a:r>
+            <a:endParaRPr lang="en-EE" sz="1800" kern="100" dirty="0">
+              <a:solidFill>
+                <a:srgbClr val="000000"/>
+              </a:solidFill>
+              <a:effectLst/>
+              <a:latin typeface="Aptos" panose="020B0004020202020204" pitchFamily="34" charset="0"/>
+              <a:ea typeface="Aptos" panose="020B0004020202020204" pitchFamily="34" charset="0"/>
+              <a:cs typeface="Times New Roman" panose="02020603050405020304" pitchFamily="18" charset="0"/>
+            </a:endParaRPr>
+          </a:p>
+          <a:p>
+            <a:endParaRPr lang="en-EE" dirty="0"/>
+          </a:p>
+        </p:txBody>
+      </p:sp>
+      <p:sp>
+        <p:nvSpPr>
+          <p:cNvPr id="4" name="Slide Number Placeholder 3"/>
+          <p:cNvSpPr>
+            <a:spLocks noGrp="1"/>
+          </p:cNvSpPr>
+          <p:nvPr>
+            <p:ph type="sldNum" sz="quarter" idx="5"/>
+          </p:nvPr>
+        </p:nvSpPr>
+        <p:spPr/>
+        <p:txBody>
+          <a:bodyPr/>
+          <a:lstStyle/>
+          <a:p>
+            <a:fld id="{DECDE012-9E2E-4477-8B5C-4E7D4E9BCBA6}" type="slidenum">
+              <a:rPr lang="en-US" noProof="0" smtClean="0"/>
+              <a:t>4</a:t>
+            </a:fld>
+            <a:endParaRPr lang="en-US" noProof="0"/>
+          </a:p>
+        </p:txBody>
+      </p:sp>
+    </p:spTree>
+    <p:extLst>
+      <p:ext uri="{BB962C8B-B14F-4D97-AF65-F5344CB8AC3E}">
+        <p14:creationId xmlns:p14="http://schemas.microsoft.com/office/powerpoint/2010/main" val="2121949986"/>
+      </p:ext>
+    </p:extLst>
+  </p:cSld>
+  <p:clrMapOvr>
+    <a:masterClrMapping/>
+  </p:clrMapOvr>
+</p:notes>
+</file>
+
+<file path=ppt/notesSlides/notesSlide5.xml><?xml version="1.0" encoding="utf-8"?>
+<p:notes xmlns:a="http://schemas.openxmlformats.org/drawingml/2006/main" xmlns:r="http://schemas.openxmlformats.org/officeDocument/2006/relationships" xmlns:p="http://schemas.openxmlformats.org/presentationml/2006/main">
+  <p:cSld>
+    <p:spTree>
+      <p:nvGrpSpPr>
+        <p:cNvPr id="1" name=""/>
+        <p:cNvGrpSpPr/>
+        <p:nvPr/>
+      </p:nvGrpSpPr>
+      <p:grpSpPr>
+        <a:xfrm>
+          <a:off x="0" y="0"/>
+          <a:ext cx="0" cy="0"/>
+          <a:chOff x="0" y="0"/>
+          <a:chExt cx="0" cy="0"/>
+        </a:xfrm>
+      </p:grpSpPr>
+      <p:sp>
+        <p:nvSpPr>
+          <p:cNvPr id="2" name="Slide Image Placeholder 1"/>
+          <p:cNvSpPr>
+            <a:spLocks noGrp="1" noRot="1" noChangeAspect="1"/>
+          </p:cNvSpPr>
+          <p:nvPr>
+            <p:ph type="sldImg"/>
+          </p:nvPr>
+        </p:nvSpPr>
+        <p:spPr/>
+      </p:sp>
+      <p:sp>
+        <p:nvSpPr>
+          <p:cNvPr id="3" name="Notes Placeholder 2"/>
+          <p:cNvSpPr>
+            <a:spLocks noGrp="1"/>
+          </p:cNvSpPr>
+          <p:nvPr>
+            <p:ph type="body" idx="1"/>
+          </p:nvPr>
+        </p:nvSpPr>
+        <p:spPr/>
+        <p:txBody>
+          <a:bodyPr/>
+          <a:lstStyle/>
+          <a:p>
+            <a:r>
+              <a:rPr lang="en-EE" sz="1800" kern="100" dirty="0">
+                <a:solidFill>
+                  <a:srgbClr val="000000"/>
+                </a:solidFill>
+                <a:effectLst/>
+                <a:latin typeface="Aptos" panose="020B0004020202020204" pitchFamily="34" charset="0"/>
+                <a:ea typeface="Times New Roman" panose="02020603050405020304" pitchFamily="18" charset="0"/>
+                <a:cs typeface="Times New Roman" panose="02020603050405020304" pitchFamily="18" charset="0"/>
+              </a:rPr>
+              <a:t>Esineja märkus:</a:t>
+            </a:r>
+            <a:endParaRPr lang="en-EE" sz="1800" kern="100" dirty="0">
+              <a:solidFill>
+                <a:srgbClr val="000000"/>
+              </a:solidFill>
+              <a:effectLst/>
+              <a:latin typeface="Aptos" panose="020B0004020202020204" pitchFamily="34" charset="0"/>
+              <a:ea typeface="Aptos" panose="020B0004020202020204" pitchFamily="34" charset="0"/>
+              <a:cs typeface="Times New Roman" panose="02020603050405020304" pitchFamily="18" charset="0"/>
+            </a:endParaRPr>
+          </a:p>
+          <a:p>
+            <a:r>
+              <a:rPr lang="en-EE" sz="1800" kern="100" dirty="0">
+                <a:solidFill>
+                  <a:srgbClr val="000000"/>
+                </a:solidFill>
+                <a:effectLst/>
+                <a:latin typeface="Aptos" panose="020B0004020202020204" pitchFamily="34" charset="0"/>
+                <a:ea typeface="Times New Roman" panose="02020603050405020304" pitchFamily="18" charset="0"/>
+                <a:cs typeface="Times New Roman" panose="02020603050405020304" pitchFamily="18" charset="0"/>
+              </a:rPr>
+              <a:t>Rõhutan, et süsteem teenindab kahte rolli: kasutaja ja administraator.</a:t>
+            </a:r>
+            <a:endParaRPr lang="en-EE" sz="1800" kern="100" dirty="0">
+              <a:solidFill>
+                <a:srgbClr val="000000"/>
+              </a:solidFill>
+              <a:effectLst/>
+              <a:latin typeface="Aptos" panose="020B0004020202020204" pitchFamily="34" charset="0"/>
+              <a:ea typeface="Aptos" panose="020B0004020202020204" pitchFamily="34" charset="0"/>
+              <a:cs typeface="Times New Roman" panose="02020603050405020304" pitchFamily="18" charset="0"/>
+            </a:endParaRPr>
+          </a:p>
+          <a:p>
+            <a:endParaRPr lang="en-EE" dirty="0"/>
+          </a:p>
+        </p:txBody>
+      </p:sp>
+      <p:sp>
+        <p:nvSpPr>
+          <p:cNvPr id="4" name="Slide Number Placeholder 3"/>
+          <p:cNvSpPr>
+            <a:spLocks noGrp="1"/>
+          </p:cNvSpPr>
+          <p:nvPr>
+            <p:ph type="sldNum" sz="quarter" idx="5"/>
+          </p:nvPr>
+        </p:nvSpPr>
+        <p:spPr/>
+        <p:txBody>
+          <a:bodyPr/>
+          <a:lstStyle/>
+          <a:p>
+            <a:fld id="{DECDE012-9E2E-4477-8B5C-4E7D4E9BCBA6}" type="slidenum">
+              <a:rPr lang="en-US" noProof="0" smtClean="0"/>
+              <a:t>5</a:t>
+            </a:fld>
+            <a:endParaRPr lang="en-US" noProof="0"/>
+          </a:p>
+        </p:txBody>
+      </p:sp>
+    </p:spTree>
+    <p:extLst>
+      <p:ext uri="{BB962C8B-B14F-4D97-AF65-F5344CB8AC3E}">
+        <p14:creationId xmlns:p14="http://schemas.microsoft.com/office/powerpoint/2010/main" val="3481970850"/>
+      </p:ext>
+    </p:extLst>
+  </p:cSld>
+  <p:clrMapOvr>
+    <a:masterClrMapping/>
+  </p:clrMapOvr>
+</p:notes>
+</file>
+
+<file path=ppt/notesSlides/notesSlide6.xml><?xml version="1.0" encoding="utf-8"?>
+<p:notes xmlns:a="http://schemas.openxmlformats.org/drawingml/2006/main" xmlns:r="http://schemas.openxmlformats.org/officeDocument/2006/relationships" xmlns:p="http://schemas.openxmlformats.org/presentationml/2006/main">
+  <p:cSld>
+    <p:spTree>
+      <p:nvGrpSpPr>
+        <p:cNvPr id="1" name=""/>
+        <p:cNvGrpSpPr/>
+        <p:nvPr/>
+      </p:nvGrpSpPr>
+      <p:grpSpPr>
+        <a:xfrm>
+          <a:off x="0" y="0"/>
+          <a:ext cx="0" cy="0"/>
+          <a:chOff x="0" y="0"/>
+          <a:chExt cx="0" cy="0"/>
+        </a:xfrm>
+      </p:grpSpPr>
+      <p:sp>
+        <p:nvSpPr>
+          <p:cNvPr id="2" name="Slide Image Placeholder 1"/>
+          <p:cNvSpPr>
+            <a:spLocks noGrp="1" noRot="1" noChangeAspect="1"/>
+          </p:cNvSpPr>
+          <p:nvPr>
+            <p:ph type="sldImg"/>
+          </p:nvPr>
+        </p:nvSpPr>
+        <p:spPr/>
+      </p:sp>
+      <p:sp>
+        <p:nvSpPr>
+          <p:cNvPr id="3" name="Notes Placeholder 2"/>
+          <p:cNvSpPr>
+            <a:spLocks noGrp="1"/>
+          </p:cNvSpPr>
+          <p:nvPr>
+            <p:ph type="body" idx="1"/>
+          </p:nvPr>
+        </p:nvSpPr>
+        <p:spPr/>
+        <p:txBody>
+          <a:bodyPr/>
+          <a:lstStyle/>
+          <a:p>
+            <a:r>
+              <a:rPr lang="en-EE" sz="1800" kern="100" dirty="0">
+                <a:solidFill>
+                  <a:srgbClr val="000000"/>
+                </a:solidFill>
+                <a:effectLst/>
+                <a:latin typeface="Aptos" panose="020B0004020202020204" pitchFamily="34" charset="0"/>
+                <a:ea typeface="Times New Roman" panose="02020603050405020304" pitchFamily="18" charset="0"/>
+                <a:cs typeface="Times New Roman" panose="02020603050405020304" pitchFamily="18" charset="0"/>
+              </a:rPr>
+              <a:t>Esineja märkus:</a:t>
+            </a:r>
+            <a:endParaRPr lang="en-EE" sz="1800" kern="100" dirty="0">
+              <a:solidFill>
+                <a:srgbClr val="000000"/>
+              </a:solidFill>
+              <a:effectLst/>
+              <a:latin typeface="Aptos" panose="020B0004020202020204" pitchFamily="34" charset="0"/>
+              <a:ea typeface="Aptos" panose="020B0004020202020204" pitchFamily="34" charset="0"/>
+              <a:cs typeface="Times New Roman" panose="02020603050405020304" pitchFamily="18" charset="0"/>
+            </a:endParaRPr>
+          </a:p>
+          <a:p>
+            <a:r>
+              <a:rPr lang="en-EE" sz="1800" kern="100" dirty="0">
+                <a:solidFill>
+                  <a:srgbClr val="000000"/>
+                </a:solidFill>
+                <a:effectLst/>
+                <a:latin typeface="Aptos" panose="020B0004020202020204" pitchFamily="34" charset="0"/>
+                <a:ea typeface="Times New Roman" panose="02020603050405020304" pitchFamily="18" charset="0"/>
+                <a:cs typeface="Times New Roman" panose="02020603050405020304" pitchFamily="18" charset="0"/>
+              </a:rPr>
+              <a:t>Selgitan, et struktuur on lihtne, kuid katab kõik vajalikud funktsioonid.</a:t>
+            </a:r>
+            <a:endParaRPr lang="en-EE" sz="1800" kern="100" dirty="0">
+              <a:solidFill>
+                <a:srgbClr val="000000"/>
+              </a:solidFill>
+              <a:effectLst/>
+              <a:latin typeface="Aptos" panose="020B0004020202020204" pitchFamily="34" charset="0"/>
+              <a:ea typeface="Aptos" panose="020B0004020202020204" pitchFamily="34" charset="0"/>
+              <a:cs typeface="Times New Roman" panose="02020603050405020304" pitchFamily="18" charset="0"/>
+            </a:endParaRPr>
+          </a:p>
+          <a:p>
+            <a:endParaRPr lang="en-EE" dirty="0"/>
+          </a:p>
+        </p:txBody>
+      </p:sp>
+      <p:sp>
+        <p:nvSpPr>
+          <p:cNvPr id="4" name="Slide Number Placeholder 3"/>
+          <p:cNvSpPr>
+            <a:spLocks noGrp="1"/>
+          </p:cNvSpPr>
+          <p:nvPr>
+            <p:ph type="sldNum" sz="quarter" idx="5"/>
+          </p:nvPr>
+        </p:nvSpPr>
+        <p:spPr/>
+        <p:txBody>
+          <a:bodyPr/>
+          <a:lstStyle/>
+          <a:p>
+            <a:fld id="{DECDE012-9E2E-4477-8B5C-4E7D4E9BCBA6}" type="slidenum">
+              <a:rPr lang="en-US" noProof="0" smtClean="0"/>
+              <a:t>6</a:t>
+            </a:fld>
+            <a:endParaRPr lang="en-US" noProof="0"/>
+          </a:p>
+        </p:txBody>
+      </p:sp>
+    </p:spTree>
+    <p:extLst>
+      <p:ext uri="{BB962C8B-B14F-4D97-AF65-F5344CB8AC3E}">
+        <p14:creationId xmlns:p14="http://schemas.microsoft.com/office/powerpoint/2010/main" val="2247068694"/>
+      </p:ext>
+    </p:extLst>
+  </p:cSld>
+  <p:clrMapOvr>
+    <a:masterClrMapping/>
+  </p:clrMapOvr>
+</p:notes>
+</file>
+
+<file path=ppt/notesSlides/notesSlide7.xml><?xml version="1.0" encoding="utf-8"?>
+<p:notes xmlns:a="http://schemas.openxmlformats.org/drawingml/2006/main" xmlns:r="http://schemas.openxmlformats.org/officeDocument/2006/relationships" xmlns:p="http://schemas.openxmlformats.org/presentationml/2006/main">
+  <p:cSld>
+    <p:spTree>
+      <p:nvGrpSpPr>
+        <p:cNvPr id="1" name=""/>
+        <p:cNvGrpSpPr/>
+        <p:nvPr/>
+      </p:nvGrpSpPr>
+      <p:grpSpPr>
+        <a:xfrm>
+          <a:off x="0" y="0"/>
+          <a:ext cx="0" cy="0"/>
+          <a:chOff x="0" y="0"/>
+          <a:chExt cx="0" cy="0"/>
+        </a:xfrm>
+      </p:grpSpPr>
+      <p:sp>
+        <p:nvSpPr>
+          <p:cNvPr id="2" name="Slide Image Placeholder 1"/>
+          <p:cNvSpPr>
+            <a:spLocks noGrp="1" noRot="1" noChangeAspect="1"/>
+          </p:cNvSpPr>
+          <p:nvPr>
+            <p:ph type="sldImg"/>
+          </p:nvPr>
+        </p:nvSpPr>
+        <p:spPr/>
+      </p:sp>
+      <p:sp>
+        <p:nvSpPr>
+          <p:cNvPr id="3" name="Notes Placeholder 2"/>
+          <p:cNvSpPr>
+            <a:spLocks noGrp="1"/>
+          </p:cNvSpPr>
+          <p:nvPr>
+            <p:ph type="body" idx="1"/>
+          </p:nvPr>
+        </p:nvSpPr>
+        <p:spPr/>
+        <p:txBody>
+          <a:bodyPr/>
+          <a:lstStyle/>
+          <a:p>
+            <a:r>
+              <a:rPr lang="en-EE" sz="1800" kern="100" dirty="0">
+                <a:solidFill>
+                  <a:srgbClr val="000000"/>
+                </a:solidFill>
+                <a:effectLst/>
+                <a:latin typeface="Aptos" panose="020B0004020202020204" pitchFamily="34" charset="0"/>
+                <a:ea typeface="Times New Roman" panose="02020603050405020304" pitchFamily="18" charset="0"/>
+                <a:cs typeface="Times New Roman" panose="02020603050405020304" pitchFamily="18" charset="0"/>
+              </a:rPr>
+              <a:t>Esineja märkus:</a:t>
+            </a:r>
+            <a:endParaRPr lang="en-EE" sz="1800" kern="100" dirty="0">
+              <a:solidFill>
+                <a:srgbClr val="000000"/>
+              </a:solidFill>
+              <a:effectLst/>
+              <a:latin typeface="Aptos" panose="020B0004020202020204" pitchFamily="34" charset="0"/>
+              <a:ea typeface="Aptos" panose="020B0004020202020204" pitchFamily="34" charset="0"/>
+              <a:cs typeface="Times New Roman" panose="02020603050405020304" pitchFamily="18" charset="0"/>
+            </a:endParaRPr>
+          </a:p>
+          <a:p>
+            <a:r>
+              <a:rPr lang="en-EE" sz="1800" kern="100" dirty="0">
+                <a:solidFill>
+                  <a:srgbClr val="000000"/>
+                </a:solidFill>
+                <a:effectLst/>
+                <a:latin typeface="Aptos" panose="020B0004020202020204" pitchFamily="34" charset="0"/>
+                <a:ea typeface="Times New Roman" panose="02020603050405020304" pitchFamily="18" charset="0"/>
+                <a:cs typeface="Times New Roman" panose="02020603050405020304" pitchFamily="18" charset="0"/>
+              </a:rPr>
+              <a:t>Rõhutan iteratiivset lähenemist — iga osa testiti eraldi.</a:t>
+            </a:r>
+            <a:endParaRPr lang="en-EE" sz="1800" kern="100" dirty="0">
+              <a:solidFill>
+                <a:srgbClr val="000000"/>
+              </a:solidFill>
+              <a:effectLst/>
+              <a:latin typeface="Aptos" panose="020B0004020202020204" pitchFamily="34" charset="0"/>
+              <a:ea typeface="Aptos" panose="020B0004020202020204" pitchFamily="34" charset="0"/>
+              <a:cs typeface="Times New Roman" panose="02020603050405020304" pitchFamily="18" charset="0"/>
+            </a:endParaRPr>
+          </a:p>
+          <a:p>
+            <a:endParaRPr lang="en-EE" dirty="0"/>
+          </a:p>
+        </p:txBody>
+      </p:sp>
+      <p:sp>
+        <p:nvSpPr>
+          <p:cNvPr id="4" name="Slide Number Placeholder 3"/>
+          <p:cNvSpPr>
+            <a:spLocks noGrp="1"/>
+          </p:cNvSpPr>
+          <p:nvPr>
+            <p:ph type="sldNum" sz="quarter" idx="5"/>
+          </p:nvPr>
+        </p:nvSpPr>
+        <p:spPr/>
+        <p:txBody>
+          <a:bodyPr/>
+          <a:lstStyle/>
+          <a:p>
+            <a:fld id="{DECDE012-9E2E-4477-8B5C-4E7D4E9BCBA6}" type="slidenum">
+              <a:rPr lang="en-US" noProof="0" smtClean="0"/>
+              <a:t>7</a:t>
+            </a:fld>
+            <a:endParaRPr lang="en-US" noProof="0"/>
+          </a:p>
+        </p:txBody>
+      </p:sp>
+    </p:spTree>
+    <p:extLst>
+      <p:ext uri="{BB962C8B-B14F-4D97-AF65-F5344CB8AC3E}">
+        <p14:creationId xmlns:p14="http://schemas.microsoft.com/office/powerpoint/2010/main" val="3545701956"/>
+      </p:ext>
+    </p:extLst>
+  </p:cSld>
+  <p:clrMapOvr>
+    <a:masterClrMapping/>
+  </p:clrMapOvr>
+</p:notes>
+</file>
+
+<file path=ppt/notesSlides/notesSlide8.xml><?xml version="1.0" encoding="utf-8"?>
+<p:notes xmlns:a="http://schemas.openxmlformats.org/drawingml/2006/main" xmlns:r="http://schemas.openxmlformats.org/officeDocument/2006/relationships" xmlns:p="http://schemas.openxmlformats.org/presentationml/2006/main">
+  <p:cSld>
+    <p:spTree>
+      <p:nvGrpSpPr>
+        <p:cNvPr id="1" name=""/>
+        <p:cNvGrpSpPr/>
+        <p:nvPr/>
+      </p:nvGrpSpPr>
+      <p:grpSpPr>
+        <a:xfrm>
+          <a:off x="0" y="0"/>
+          <a:ext cx="0" cy="0"/>
+          <a:chOff x="0" y="0"/>
+          <a:chExt cx="0" cy="0"/>
+        </a:xfrm>
+      </p:grpSpPr>
+      <p:sp>
+        <p:nvSpPr>
+          <p:cNvPr id="2" name="Slide Image Placeholder 1"/>
+          <p:cNvSpPr>
+            <a:spLocks noGrp="1" noRot="1" noChangeAspect="1"/>
+          </p:cNvSpPr>
+          <p:nvPr>
+            <p:ph type="sldImg"/>
+          </p:nvPr>
+        </p:nvSpPr>
+        <p:spPr/>
+      </p:sp>
+      <p:sp>
+        <p:nvSpPr>
+          <p:cNvPr id="3" name="Notes Placeholder 2"/>
+          <p:cNvSpPr>
+            <a:spLocks noGrp="1"/>
+          </p:cNvSpPr>
+          <p:nvPr>
+            <p:ph type="body" idx="1"/>
+          </p:nvPr>
+        </p:nvSpPr>
+        <p:spPr/>
+        <p:txBody>
+          <a:bodyPr/>
+          <a:lstStyle/>
+          <a:p>
+            <a:r>
+              <a:rPr lang="en-EE" sz="1800" kern="100" dirty="0">
+                <a:solidFill>
+                  <a:srgbClr val="000000"/>
+                </a:solidFill>
+                <a:effectLst/>
+                <a:latin typeface="Aptos" panose="020B0004020202020204" pitchFamily="34" charset="0"/>
+                <a:ea typeface="Times New Roman" panose="02020603050405020304" pitchFamily="18" charset="0"/>
+                <a:cs typeface="Times New Roman" panose="02020603050405020304" pitchFamily="18" charset="0"/>
+              </a:rPr>
+              <a:t>Esineja märkus:</a:t>
+            </a:r>
+            <a:endParaRPr lang="en-EE" sz="1800" kern="100" dirty="0">
+              <a:solidFill>
+                <a:srgbClr val="000000"/>
+              </a:solidFill>
+              <a:effectLst/>
+              <a:latin typeface="Aptos" panose="020B0004020202020204" pitchFamily="34" charset="0"/>
+              <a:ea typeface="Aptos" panose="020B0004020202020204" pitchFamily="34" charset="0"/>
+              <a:cs typeface="Times New Roman" panose="02020603050405020304" pitchFamily="18" charset="0"/>
+            </a:endParaRPr>
+          </a:p>
+          <a:p>
+            <a:r>
+              <a:rPr lang="en-EE" sz="1800" kern="100" dirty="0">
+                <a:solidFill>
+                  <a:srgbClr val="000000"/>
+                </a:solidFill>
+                <a:effectLst/>
+                <a:latin typeface="Aptos" panose="020B0004020202020204" pitchFamily="34" charset="0"/>
+                <a:ea typeface="Times New Roman" panose="02020603050405020304" pitchFamily="18" charset="0"/>
+                <a:cs typeface="Times New Roman" panose="02020603050405020304" pitchFamily="18" charset="0"/>
+              </a:rPr>
+              <a:t>Mainin, et kasutajad hindasid kiirust ja lihtsust.</a:t>
+            </a:r>
+            <a:endParaRPr lang="en-EE" sz="1800" kern="100" dirty="0">
+              <a:solidFill>
+                <a:srgbClr val="000000"/>
+              </a:solidFill>
+              <a:effectLst/>
+              <a:latin typeface="Aptos" panose="020B0004020202020204" pitchFamily="34" charset="0"/>
+              <a:ea typeface="Aptos" panose="020B0004020202020204" pitchFamily="34" charset="0"/>
+              <a:cs typeface="Times New Roman" panose="02020603050405020304" pitchFamily="18" charset="0"/>
+            </a:endParaRPr>
+          </a:p>
+          <a:p>
+            <a:endParaRPr lang="en-EE" dirty="0"/>
+          </a:p>
+        </p:txBody>
+      </p:sp>
+      <p:sp>
+        <p:nvSpPr>
+          <p:cNvPr id="4" name="Slide Number Placeholder 3"/>
+          <p:cNvSpPr>
+            <a:spLocks noGrp="1"/>
+          </p:cNvSpPr>
+          <p:nvPr>
+            <p:ph type="sldNum" sz="quarter" idx="5"/>
+          </p:nvPr>
+        </p:nvSpPr>
+        <p:spPr/>
+        <p:txBody>
+          <a:bodyPr/>
+          <a:lstStyle/>
+          <a:p>
+            <a:fld id="{DECDE012-9E2E-4477-8B5C-4E7D4E9BCBA6}" type="slidenum">
+              <a:rPr lang="en-US" noProof="0" smtClean="0"/>
+              <a:t>8</a:t>
+            </a:fld>
+            <a:endParaRPr lang="en-US" noProof="0"/>
+          </a:p>
+        </p:txBody>
+      </p:sp>
+    </p:spTree>
+    <p:extLst>
+      <p:ext uri="{BB962C8B-B14F-4D97-AF65-F5344CB8AC3E}">
+        <p14:creationId xmlns:p14="http://schemas.microsoft.com/office/powerpoint/2010/main" val="4177176805"/>
+      </p:ext>
+    </p:extLst>
+  </p:cSld>
+  <p:clrMapOvr>
+    <a:masterClrMapping/>
+  </p:clrMapOvr>
+</p:notes>
+</file>
+
+<file path=ppt/notesSlides/notesSlide9.xml><?xml version="1.0" encoding="utf-8"?>
+<p:notes xmlns:a="http://schemas.openxmlformats.org/drawingml/2006/main" xmlns:r="http://schemas.openxmlformats.org/officeDocument/2006/relationships" xmlns:p="http://schemas.openxmlformats.org/presentationml/2006/main">
+  <p:cSld>
+    <p:spTree>
+      <p:nvGrpSpPr>
+        <p:cNvPr id="1" name=""/>
+        <p:cNvGrpSpPr/>
+        <p:nvPr/>
+      </p:nvGrpSpPr>
+      <p:grpSpPr>
+        <a:xfrm>
+          <a:off x="0" y="0"/>
+          <a:ext cx="0" cy="0"/>
+          <a:chOff x="0" y="0"/>
+          <a:chExt cx="0" cy="0"/>
+        </a:xfrm>
+      </p:grpSpPr>
+      <p:sp>
+        <p:nvSpPr>
+          <p:cNvPr id="2" name="Slide Image Placeholder 1"/>
+          <p:cNvSpPr>
+            <a:spLocks noGrp="1" noRot="1" noChangeAspect="1"/>
+          </p:cNvSpPr>
+          <p:nvPr>
+            <p:ph type="sldImg"/>
+          </p:nvPr>
+        </p:nvSpPr>
+        <p:spPr/>
+      </p:sp>
+      <p:sp>
+        <p:nvSpPr>
+          <p:cNvPr id="3" name="Notes Placeholder 2"/>
+          <p:cNvSpPr>
+            <a:spLocks noGrp="1"/>
+          </p:cNvSpPr>
+          <p:nvPr>
+            <p:ph type="body" idx="1"/>
+          </p:nvPr>
+        </p:nvSpPr>
+        <p:spPr/>
+        <p:txBody>
+          <a:bodyPr/>
+          <a:lstStyle/>
+          <a:p>
+            <a:r>
+              <a:rPr lang="en-EE" sz="1800" kern="100" dirty="0">
+                <a:solidFill>
+                  <a:srgbClr val="000000"/>
+                </a:solidFill>
+                <a:effectLst/>
+                <a:latin typeface="Aptos" panose="020B0004020202020204" pitchFamily="34" charset="0"/>
+                <a:ea typeface="Times New Roman" panose="02020603050405020304" pitchFamily="18" charset="0"/>
+                <a:cs typeface="Times New Roman" panose="02020603050405020304" pitchFamily="18" charset="0"/>
+              </a:rPr>
+              <a:t>Esineja märkus:</a:t>
+            </a:r>
+            <a:endParaRPr lang="en-EE" sz="1800" kern="100" dirty="0">
+              <a:solidFill>
+                <a:srgbClr val="000000"/>
+              </a:solidFill>
+              <a:effectLst/>
+              <a:latin typeface="Aptos" panose="020B0004020202020204" pitchFamily="34" charset="0"/>
+              <a:ea typeface="Aptos" panose="020B0004020202020204" pitchFamily="34" charset="0"/>
+              <a:cs typeface="Times New Roman" panose="02020603050405020304" pitchFamily="18" charset="0"/>
+            </a:endParaRPr>
+          </a:p>
+          <a:p>
+            <a:r>
+              <a:rPr lang="en-EE" sz="1800" kern="100" dirty="0">
+                <a:solidFill>
+                  <a:srgbClr val="000000"/>
+                </a:solidFill>
+                <a:effectLst/>
+                <a:latin typeface="Aptos" panose="020B0004020202020204" pitchFamily="34" charset="0"/>
+                <a:ea typeface="Times New Roman" panose="02020603050405020304" pitchFamily="18" charset="0"/>
+                <a:cs typeface="Times New Roman" panose="02020603050405020304" pitchFamily="18" charset="0"/>
+              </a:rPr>
+              <a:t>Toon välja reaalse kasu koolile.</a:t>
+            </a:r>
+            <a:endParaRPr lang="en-EE" sz="1800" kern="100" dirty="0">
+              <a:solidFill>
+                <a:srgbClr val="000000"/>
+              </a:solidFill>
+              <a:effectLst/>
+              <a:latin typeface="Aptos" panose="020B0004020202020204" pitchFamily="34" charset="0"/>
+              <a:ea typeface="Aptos" panose="020B0004020202020204" pitchFamily="34" charset="0"/>
+              <a:cs typeface="Times New Roman" panose="02020603050405020304" pitchFamily="18" charset="0"/>
+            </a:endParaRPr>
+          </a:p>
+          <a:p>
+            <a:endParaRPr lang="en-EE" dirty="0"/>
+          </a:p>
+        </p:txBody>
+      </p:sp>
+      <p:sp>
+        <p:nvSpPr>
+          <p:cNvPr id="4" name="Slide Number Placeholder 3"/>
+          <p:cNvSpPr>
+            <a:spLocks noGrp="1"/>
+          </p:cNvSpPr>
+          <p:nvPr>
+            <p:ph type="sldNum" sz="quarter" idx="5"/>
+          </p:nvPr>
+        </p:nvSpPr>
+        <p:spPr/>
+        <p:txBody>
+          <a:bodyPr/>
+          <a:lstStyle/>
+          <a:p>
+            <a:fld id="{DECDE012-9E2E-4477-8B5C-4E7D4E9BCBA6}" type="slidenum">
+              <a:rPr lang="en-US" noProof="0" smtClean="0"/>
+              <a:t>9</a:t>
+            </a:fld>
+            <a:endParaRPr lang="en-US" noProof="0"/>
+          </a:p>
+        </p:txBody>
+      </p:sp>
+    </p:spTree>
+    <p:extLst>
+      <p:ext uri="{BB962C8B-B14F-4D97-AF65-F5344CB8AC3E}">
+        <p14:creationId xmlns:p14="http://schemas.microsoft.com/office/powerpoint/2010/main" val="1369370437"/>
+      </p:ext>
+    </p:extLst>
+  </p:cSld>
+  <p:clrMapOvr>
+    <a:masterClrMapping/>
+  </p:clrMapOvr>
+</p:notes>
 </file>
 
 <file path=ppt/slideLayouts/slideLayout1.xml><?xml version="1.0" encoding="utf-8"?>
@@ -13115,6 +14537,15 @@
 </file>
 
 <file path=customXml/item1.xml><?xml version="1.0" encoding="utf-8"?>
+<?mso-contentType ?>
+<FormTemplates xmlns="http://schemas.microsoft.com/sharepoint/v3/contenttype/forms">
+  <Display>DocumentLibraryForm</Display>
+  <Edit>DocumentLibraryForm</Edit>
+  <New>DocumentLibraryForm</New>
+</FormTemplates>
+</file>
+
+<file path=customXml/item2.xml><?xml version="1.0" encoding="utf-8"?>
 <p:properties xmlns:p="http://schemas.microsoft.com/office/2006/metadata/properties" xmlns:xsi="http://www.w3.org/2001/XMLSchema-instance" xmlns:pc="http://schemas.microsoft.com/office/infopath/2007/PartnerControls">
   <documentManagement>
     <_ip_UnifiedCompliancePolicyUIAction xmlns="http://schemas.microsoft.com/sharepoint/v3" xsi:nil="true"/>
@@ -13132,15 +14563,6 @@
     <MediaServiceKeyPoints xmlns="71af3243-3dd4-4a8d-8c0d-dd76da1f02a5" xsi:nil="true"/>
   </documentManagement>
 </p:properties>
-</file>
-
-<file path=customXml/item2.xml><?xml version="1.0" encoding="utf-8"?>
-<?mso-contentType ?>
-<FormTemplates xmlns="http://schemas.microsoft.com/sharepoint/v3/contenttype/forms">
-  <Display>DocumentLibraryForm</Display>
-  <Edit>DocumentLibraryForm</Edit>
-  <New>DocumentLibraryForm</New>
-</FormTemplates>
 </file>
 
 <file path=customXml/item3.xml><?xml version="1.0" encoding="utf-8"?>
@@ -13432,6 +14854,14 @@
 </file>
 
 <file path=customXml/itemProps1.xml><?xml version="1.0" encoding="utf-8"?>
+<ds:datastoreItem xmlns:ds="http://schemas.openxmlformats.org/officeDocument/2006/customXml" ds:itemID="{A66A1098-79A7-47E8-8A61-8CB2B72760B2}">
+  <ds:schemaRefs>
+    <ds:schemaRef ds:uri="http://schemas.microsoft.com/sharepoint/v3/contenttype/forms"/>
+  </ds:schemaRefs>
+</ds:datastoreItem>
+</file>
+
+<file path=customXml/itemProps2.xml><?xml version="1.0" encoding="utf-8"?>
 <ds:datastoreItem xmlns:ds="http://schemas.openxmlformats.org/officeDocument/2006/customXml" ds:itemID="{92CF51A7-9108-45AF-AF64-7A03A8DEEF80}">
   <ds:schemaRefs>
     <ds:schemaRef ds:uri="http://schemas.microsoft.com/office/2006/metadata/properties"/>
@@ -13441,14 +14871,6 @@
     <ds:schemaRef ds:uri="71af3243-3dd4-4a8d-8c0d-dd76da1f02a5"/>
     <ds:schemaRef ds:uri="http://schemas.microsoft.com/office/infopath/2007/PartnerControls"/>
     <ds:schemaRef ds:uri="230e9df3-be65-4c73-a93b-d1236ebd677e"/>
-  </ds:schemaRefs>
-</ds:datastoreItem>
-</file>
-
-<file path=customXml/itemProps2.xml><?xml version="1.0" encoding="utf-8"?>
-<ds:datastoreItem xmlns:ds="http://schemas.openxmlformats.org/officeDocument/2006/customXml" ds:itemID="{A66A1098-79A7-47E8-8A61-8CB2B72760B2}">
-  <ds:schemaRefs>
-    <ds:schemaRef ds:uri="http://schemas.microsoft.com/sharepoint/v3/contenttype/forms"/>
   </ds:schemaRefs>
 </ds:datastoreItem>
 </file>
